--- a/public/fun/pack/pptx/familypro/가족소개프리미엄_16_우리부부_마린화이트.pptx
+++ b/public/fun/pack/pptx/familypro/가족소개프리미엄_16_우리부부_마린화이트.pptx
@@ -113,12 +113,12 @@
   <p:extLst>
     <p:ext uri="{521415D9-36F7-43E2-AB2F-B90AF26B5E84}">
       <p14:sectionLst xmlns:p14="http://schemas.microsoft.com/office/powerpoint/2010/main">
-        <p14:section name="시작" id="{DB1CA107-3763-4069-B25A-B88CDD9847FE}">
+        <p14:section name="시작" id="{B88F5B8B-9A48-4A49-B456-99B3E1498139}">
           <p14:sldIdLst>
             <p14:sldId id="256"/>
           </p14:sldIdLst>
         </p14:section>
-        <p14:section name="본문" id="{67520B6A-7BCF-4F94-A036-2E76C53653F8}">
+        <p14:section name="본문" id="{F5C49CE6-DCE3-4C10-90C0-DBD5711B2E84}">
           <p14:sldIdLst>
             <p14:sldId id="257"/>
             <p14:sldId id="258"/>
@@ -127,7 +127,7 @@
             <p14:sldId id="261"/>
           </p14:sldIdLst>
         </p14:section>
-        <p14:section name="마무리" id="{FF26F709-37FD-4D6F-8511-7F048B7E5434}">
+        <p14:section name="마무리" id="{DAFE9372-76CC-45D5-BA9F-46128E99B924}">
           <p14:sldIdLst>
             <p14:sldId id="262"/>
           </p14:sldIdLst>
@@ -1560,7 +1560,7 @@
             </a:lvl1pPr>
           </a:lstStyle>
           <a:p>
-            <a:fld id="{657961FC-2F14-473F-B5F3-3F03E444FC0C}" type="slidenum">
+            <a:fld id="{6AB897A7-6FC2-4B8A-85AC-F6214EFC79A4}" type="slidenum">
               <a:rPr lang="en-US"/>
               <a:t>‹#›</a:t>
             </a:fld>
@@ -2253,7 +2253,7 @@
             </a:lvl1pPr>
           </a:lstStyle>
           <a:p>
-            <a:fld id="{BDCA2CE1-3154-4853-A02F-C009F7963784}" type="slidenum">
+            <a:fld id="{F182869C-AF4D-4BEF-849C-BCE8AB2FD1F6}" type="slidenum">
               <a:rPr lang="en-US"/>
               <a:t>‹#›</a:t>
             </a:fld>
@@ -2931,7 +2931,7 @@
             </a:lvl1pPr>
           </a:lstStyle>
           <a:p>
-            <a:fld id="{5E1C991B-67A5-4DD1-A754-688269B16BCC}" type="slidenum">
+            <a:fld id="{C83651C6-B5E6-4847-8CD6-E0CF4E8E75AA}" type="slidenum">
               <a:rPr lang="en-US"/>
               <a:t>‹#›</a:t>
             </a:fld>
@@ -3794,7 +3794,7 @@
           <a:p>
             <a:r>
               <a:rPr lang="ko-KR"/>
-              <a:t>우리 부부 · 0000. 00. 00</a:t>
+              <a:t>우리 부부 · 날짜 입력</a:t>
             </a:r>
           </a:p>
         </p:txBody>
@@ -4017,7 +4017,7 @@
           <a:bodyPr/>
           <a:lstStyle/>
           <a:p>
-            <a:fld id="{F27D562A-CE2D-4D56-87DF-8E31C82E7046}" type="slidenum">
+            <a:fld id="{3C07A451-9C4F-4442-A7C1-9157F7E6E600}" type="slidenum">
               <a:rPr lang="en-US"/>
               <a:t>‹#›</a:t>
             </a:fld>
@@ -4419,7 +4419,7 @@
           <a:bodyPr/>
           <a:lstStyle/>
           <a:p>
-            <a:fld id="{527C5B41-F9DD-4F86-9330-6E66AF7EE024}" type="slidenum">
+            <a:fld id="{9DD7AE2E-C397-4350-AAAB-2792E5C60515}" type="slidenum">
               <a:rPr lang="en-US"/>
               <a:t>‹#›</a:t>
             </a:fld>
@@ -5394,7 +5394,7 @@
           <a:bodyPr/>
           <a:lstStyle/>
           <a:p>
-            <a:fld id="{D7DA973C-A639-48EE-AAC5-F3AF19301A1D}" type="slidenum">
+            <a:fld id="{A6879F93-5DEA-4202-978E-9B20CDAAAEF7}" type="slidenum">
               <a:rPr lang="en-US"/>
               <a:t>‹#›</a:t>
             </a:fld>
@@ -6667,7 +6667,7 @@
           <a:bodyPr/>
           <a:lstStyle/>
           <a:p>
-            <a:fld id="{B01A28FC-E23E-449D-80CF-0EAE19C1B45C}" type="slidenum">
+            <a:fld id="{AE85C228-AC4D-4043-BB4A-3007E0D7AACC}" type="slidenum">
               <a:rPr lang="en-US"/>
               <a:t>‹#›</a:t>
             </a:fld>
@@ -6755,7 +6755,7 @@
           <a:bodyPr/>
           <a:lstStyle/>
           <a:p>
-            <a:fld id="{0A57EE1B-C0DD-4A85-AE6F-2B4C2E687DAE}" type="slidenum">
+            <a:fld id="{443FEF8F-D46F-4445-8D51-8201F2EA2F5C}" type="slidenum">
               <a:rPr lang="en-US"/>
               <a:t>‹#›</a:t>
             </a:fld>
